--- a/output_pptx/Peace_Has_Come.pptx
+++ b/output_pptx/Peace_Has_Come.pptx
@@ -3119,8 +3119,8 @@
         </p:nvSpPr>
         <p:spPr>
           <a:xfrm>
-            <a:off x="594360" y="2258568"/>
-            <a:ext cx="11002975" cy="685800"/>
+            <a:off x="640080" y="2052828"/>
+            <a:ext cx="10911535" cy="731520"/>
           </a:xfrm>
           <a:prstGeom prst="rect">
             <a:avLst/>
@@ -3135,7 +3135,7 @@
           <a:p>
             <a:pPr algn="ctr"/>
             <a:r>
-              <a:rPr sz="4400" b="1" i="0">
+              <a:rPr sz="4800" b="1" i="0">
                 <a:solidFill>
                   <a:srgbClr val="FFFFFF"/>
                 </a:solidFill>
@@ -3154,8 +3154,8 @@
         </p:nvSpPr>
         <p:spPr>
           <a:xfrm>
-            <a:off x="594360" y="2980944"/>
-            <a:ext cx="11002975" cy="347472"/>
+            <a:off x="640080" y="2985516"/>
+            <a:ext cx="10911535" cy="731520"/>
           </a:xfrm>
           <a:prstGeom prst="rect">
             <a:avLst/>
@@ -3170,83 +3170,13 @@
           <a:p>
             <a:pPr algn="ctr"/>
             <a:r>
-              <a:rPr sz="2200" b="0" i="1">
-                <a:solidFill>
-                  <a:srgbClr val="8C8C8C"/>
-                </a:solidFill>
-                <a:latin typeface="Arial"/>
-              </a:rPr>
-              <a:t/>
-            </a:r>
-          </a:p>
-        </p:txBody>
-      </p:sp>
-      <p:sp>
-        <p:nvSpPr>
-          <p:cNvPr id="4" name="TextBox 3"/>
-          <p:cNvSpPr txBox="1"/>
-          <p:nvPr/>
-        </p:nvSpPr>
-        <p:spPr>
-          <a:xfrm>
-            <a:off x="594360" y="3529584"/>
-            <a:ext cx="11002975" cy="685800"/>
-          </a:xfrm>
-          <a:prstGeom prst="rect">
-            <a:avLst/>
-          </a:prstGeom>
-          <a:noFill/>
-        </p:spPr>
-        <p:txBody>
-          <a:bodyPr wrap="square">
-            <a:spAutoFit/>
-          </a:bodyPr>
-          <a:lstStyle/>
-          <a:p>
-            <a:pPr algn="ctr"/>
-            <a:r>
-              <a:rPr sz="4400" b="1" i="0">
+              <a:rPr sz="4800" b="1" i="0">
                 <a:solidFill>
                   <a:srgbClr val="FFFFFF"/>
                 </a:solidFill>
                 <a:latin typeface="Arial"/>
               </a:rPr>
               <a:t>Paz chegou</a:t>
-            </a:r>
-          </a:p>
-        </p:txBody>
-      </p:sp>
-      <p:sp>
-        <p:nvSpPr>
-          <p:cNvPr id="5" name="TextBox 4"/>
-          <p:cNvSpPr txBox="1"/>
-          <p:nvPr/>
-        </p:nvSpPr>
-        <p:spPr>
-          <a:xfrm>
-            <a:off x="594360" y="4251960"/>
-            <a:ext cx="11002975" cy="347472"/>
-          </a:xfrm>
-          <a:prstGeom prst="rect">
-            <a:avLst/>
-          </a:prstGeom>
-          <a:noFill/>
-        </p:spPr>
-        <p:txBody>
-          <a:bodyPr wrap="square">
-            <a:spAutoFit/>
-          </a:bodyPr>
-          <a:lstStyle/>
-          <a:p>
-            <a:pPr algn="ctr"/>
-            <a:r>
-              <a:rPr sz="2200" b="0" i="1">
-                <a:solidFill>
-                  <a:srgbClr val="8C8C8C"/>
-                </a:solidFill>
-                <a:latin typeface="Arial"/>
-              </a:rPr>
-              <a:t/>
             </a:r>
           </a:p>
         </p:txBody>
@@ -3285,8 +3215,8 @@
         </p:nvSpPr>
         <p:spPr>
           <a:xfrm>
-            <a:off x="594360" y="2258568"/>
-            <a:ext cx="11002975" cy="685800"/>
+            <a:off x="640080" y="2052828"/>
+            <a:ext cx="10911535" cy="731520"/>
           </a:xfrm>
           <a:prstGeom prst="rect">
             <a:avLst/>
@@ -3301,7 +3231,7 @@
           <a:p>
             <a:pPr algn="ctr"/>
             <a:r>
-              <a:rPr sz="4400" b="1" i="0">
+              <a:rPr sz="4800" b="1" i="0">
                 <a:solidFill>
                   <a:srgbClr val="FFFFFF"/>
                 </a:solidFill>
@@ -3320,8 +3250,8 @@
         </p:nvSpPr>
         <p:spPr>
           <a:xfrm>
-            <a:off x="594360" y="2980944"/>
-            <a:ext cx="11002975" cy="347472"/>
+            <a:off x="640080" y="2985516"/>
+            <a:ext cx="10911535" cy="731520"/>
           </a:xfrm>
           <a:prstGeom prst="rect">
             <a:avLst/>
@@ -3336,83 +3266,13 @@
           <a:p>
             <a:pPr algn="ctr"/>
             <a:r>
-              <a:rPr sz="2200" b="0" i="1">
-                <a:solidFill>
-                  <a:srgbClr val="8C8C8C"/>
-                </a:solidFill>
-                <a:latin typeface="Arial"/>
-              </a:rPr>
-              <a:t/>
-            </a:r>
-          </a:p>
-        </p:txBody>
-      </p:sp>
-      <p:sp>
-        <p:nvSpPr>
-          <p:cNvPr id="4" name="TextBox 3"/>
-          <p:cNvSpPr txBox="1"/>
-          <p:nvPr/>
-        </p:nvSpPr>
-        <p:spPr>
-          <a:xfrm>
-            <a:off x="594360" y="3529584"/>
-            <a:ext cx="11002975" cy="685800"/>
-          </a:xfrm>
-          <a:prstGeom prst="rect">
-            <a:avLst/>
-          </a:prstGeom>
-          <a:noFill/>
-        </p:spPr>
-        <p:txBody>
-          <a:bodyPr wrap="square">
-            <a:spAutoFit/>
-          </a:bodyPr>
-          <a:lstStyle/>
-          <a:p>
-            <a:pPr algn="ctr"/>
-            <a:r>
-              <a:rPr sz="4400" b="1" i="0">
+              <a:rPr sz="4800" b="1" i="0">
                 <a:solidFill>
                   <a:srgbClr val="FFFFFF"/>
                 </a:solidFill>
                 <a:latin typeface="Arial"/>
               </a:rPr>
               <a:t>Santo, santo, santo</a:t>
-            </a:r>
-          </a:p>
-        </p:txBody>
-      </p:sp>
-      <p:sp>
-        <p:nvSpPr>
-          <p:cNvPr id="5" name="TextBox 4"/>
-          <p:cNvSpPr txBox="1"/>
-          <p:nvPr/>
-        </p:nvSpPr>
-        <p:spPr>
-          <a:xfrm>
-            <a:off x="594360" y="4251960"/>
-            <a:ext cx="11002975" cy="347472"/>
-          </a:xfrm>
-          <a:prstGeom prst="rect">
-            <a:avLst/>
-          </a:prstGeom>
-          <a:noFill/>
-        </p:spPr>
-        <p:txBody>
-          <a:bodyPr wrap="square">
-            <a:spAutoFit/>
-          </a:bodyPr>
-          <a:lstStyle/>
-          <a:p>
-            <a:pPr algn="ctr"/>
-            <a:r>
-              <a:rPr sz="2200" b="0" i="1">
-                <a:solidFill>
-                  <a:srgbClr val="8C8C8C"/>
-                </a:solidFill>
-                <a:latin typeface="Arial"/>
-              </a:rPr>
-              <a:t/>
             </a:r>
           </a:p>
         </p:txBody>
@@ -3451,8 +3311,8 @@
         </p:nvSpPr>
         <p:spPr>
           <a:xfrm>
-            <a:off x="594360" y="2258568"/>
-            <a:ext cx="11002975" cy="685800"/>
+            <a:off x="640080" y="2052828"/>
+            <a:ext cx="10911535" cy="731520"/>
           </a:xfrm>
           <a:prstGeom prst="rect">
             <a:avLst/>
@@ -3467,7 +3327,7 @@
           <a:p>
             <a:pPr algn="ctr"/>
             <a:r>
-              <a:rPr sz="4400" b="1" i="0">
+              <a:rPr sz="4800" b="1" i="0">
                 <a:solidFill>
                   <a:srgbClr val="FFFFFF"/>
                 </a:solidFill>
@@ -3486,8 +3346,8 @@
         </p:nvSpPr>
         <p:spPr>
           <a:xfrm>
-            <a:off x="594360" y="2980944"/>
-            <a:ext cx="11002975" cy="347472"/>
+            <a:off x="640080" y="2985516"/>
+            <a:ext cx="10911535" cy="731520"/>
           </a:xfrm>
           <a:prstGeom prst="rect">
             <a:avLst/>
@@ -3502,83 +3362,13 @@
           <a:p>
             <a:pPr algn="ctr"/>
             <a:r>
-              <a:rPr sz="2200" b="0" i="1">
-                <a:solidFill>
-                  <a:srgbClr val="8C8C8C"/>
-                </a:solidFill>
-                <a:latin typeface="Arial"/>
-              </a:rPr>
-              <a:t/>
-            </a:r>
-          </a:p>
-        </p:txBody>
-      </p:sp>
-      <p:sp>
-        <p:nvSpPr>
-          <p:cNvPr id="4" name="TextBox 3"/>
-          <p:cNvSpPr txBox="1"/>
-          <p:nvPr/>
-        </p:nvSpPr>
-        <p:spPr>
-          <a:xfrm>
-            <a:off x="594360" y="3529584"/>
-            <a:ext cx="11002975" cy="685800"/>
-          </a:xfrm>
-          <a:prstGeom prst="rect">
-            <a:avLst/>
-          </a:prstGeom>
-          <a:noFill/>
-        </p:spPr>
-        <p:txBody>
-          <a:bodyPr wrap="square">
-            <a:spAutoFit/>
-          </a:bodyPr>
-          <a:lstStyle/>
-          <a:p>
-            <a:pPr algn="ctr"/>
-            <a:r>
-              <a:rPr sz="3911" b="1" i="0">
+              <a:rPr sz="4200" b="1" i="0">
                 <a:solidFill>
                   <a:srgbClr val="FFFFFF"/>
                 </a:solidFill>
                 <a:latin typeface="Arial"/>
               </a:rPr>
               <a:t>Paz chegou, o nosso Rei está conosco</a:t>
-            </a:r>
-          </a:p>
-        </p:txBody>
-      </p:sp>
-      <p:sp>
-        <p:nvSpPr>
-          <p:cNvPr id="5" name="TextBox 4"/>
-          <p:cNvSpPr txBox="1"/>
-          <p:nvPr/>
-        </p:nvSpPr>
-        <p:spPr>
-          <a:xfrm>
-            <a:off x="594360" y="4251960"/>
-            <a:ext cx="11002975" cy="347472"/>
-          </a:xfrm>
-          <a:prstGeom prst="rect">
-            <a:avLst/>
-          </a:prstGeom>
-          <a:noFill/>
-        </p:spPr>
-        <p:txBody>
-          <a:bodyPr wrap="square">
-            <a:spAutoFit/>
-          </a:bodyPr>
-          <a:lstStyle/>
-          <a:p>
-            <a:pPr algn="ctr"/>
-            <a:r>
-              <a:rPr sz="2200" b="0" i="1">
-                <a:solidFill>
-                  <a:srgbClr val="8C8C8C"/>
-                </a:solidFill>
-                <a:latin typeface="Arial"/>
-              </a:rPr>
-              <a:t/>
             </a:r>
           </a:p>
         </p:txBody>
@@ -3617,8 +3407,8 @@
         </p:nvSpPr>
         <p:spPr>
           <a:xfrm>
-            <a:off x="594360" y="2258568"/>
-            <a:ext cx="11002975" cy="685800"/>
+            <a:off x="640080" y="2052828"/>
+            <a:ext cx="10911535" cy="731520"/>
           </a:xfrm>
           <a:prstGeom prst="rect">
             <a:avLst/>
@@ -3633,7 +3423,7 @@
           <a:p>
             <a:pPr algn="ctr"/>
             <a:r>
-              <a:rPr sz="4400" b="1" i="0">
+              <a:rPr sz="4800" b="1" i="0">
                 <a:solidFill>
                   <a:srgbClr val="FFFFFF"/>
                 </a:solidFill>
@@ -3652,8 +3442,8 @@
         </p:nvSpPr>
         <p:spPr>
           <a:xfrm>
-            <a:off x="594360" y="2980944"/>
-            <a:ext cx="11002975" cy="347472"/>
+            <a:off x="640080" y="2985516"/>
+            <a:ext cx="10911535" cy="731520"/>
           </a:xfrm>
           <a:prstGeom prst="rect">
             <a:avLst/>
@@ -3668,83 +3458,13 @@
           <a:p>
             <a:pPr algn="ctr"/>
             <a:r>
-              <a:rPr sz="2200" b="0" i="1">
-                <a:solidFill>
-                  <a:srgbClr val="8C8C8C"/>
-                </a:solidFill>
-                <a:latin typeface="Arial"/>
-              </a:rPr>
-              <a:t/>
-            </a:r>
-          </a:p>
-        </p:txBody>
-      </p:sp>
-      <p:sp>
-        <p:nvSpPr>
-          <p:cNvPr id="4" name="TextBox 3"/>
-          <p:cNvSpPr txBox="1"/>
-          <p:nvPr/>
-        </p:nvSpPr>
-        <p:spPr>
-          <a:xfrm>
-            <a:off x="594360" y="3529584"/>
-            <a:ext cx="11002975" cy="685800"/>
-          </a:xfrm>
-          <a:prstGeom prst="rect">
-            <a:avLst/>
-          </a:prstGeom>
-          <a:noFill/>
-        </p:spPr>
-        <p:txBody>
-          <a:bodyPr wrap="square">
-            <a:spAutoFit/>
-          </a:bodyPr>
-          <a:lstStyle/>
-          <a:p>
-            <a:pPr algn="ctr"/>
-            <a:r>
-              <a:rPr sz="4141" b="1" i="0">
+              <a:rPr sz="4500" b="1" i="0">
                 <a:solidFill>
                   <a:srgbClr val="FFFFFF"/>
                 </a:solidFill>
                 <a:latin typeface="Arial"/>
               </a:rPr>
               <a:t>Ó vinde adoremos, Cristo, o Senhor</a:t>
-            </a:r>
-          </a:p>
-        </p:txBody>
-      </p:sp>
-      <p:sp>
-        <p:nvSpPr>
-          <p:cNvPr id="5" name="TextBox 4"/>
-          <p:cNvSpPr txBox="1"/>
-          <p:nvPr/>
-        </p:nvSpPr>
-        <p:spPr>
-          <a:xfrm>
-            <a:off x="594360" y="4251960"/>
-            <a:ext cx="11002975" cy="347472"/>
-          </a:xfrm>
-          <a:prstGeom prst="rect">
-            <a:avLst/>
-          </a:prstGeom>
-          <a:noFill/>
-        </p:spPr>
-        <p:txBody>
-          <a:bodyPr wrap="square">
-            <a:spAutoFit/>
-          </a:bodyPr>
-          <a:lstStyle/>
-          <a:p>
-            <a:pPr algn="ctr"/>
-            <a:r>
-              <a:rPr sz="2200" b="0" i="1">
-                <a:solidFill>
-                  <a:srgbClr val="8C8C8C"/>
-                </a:solidFill>
-                <a:latin typeface="Arial"/>
-              </a:rPr>
-              <a:t/>
             </a:r>
           </a:p>
         </p:txBody>
@@ -3783,8 +3503,8 @@
         </p:nvSpPr>
         <p:spPr>
           <a:xfrm>
-            <a:off x="594360" y="2894076"/>
-            <a:ext cx="11002975" cy="685800"/>
+            <a:off x="640080" y="2702052"/>
+            <a:ext cx="10911535" cy="731520"/>
           </a:xfrm>
           <a:prstGeom prst="rect">
             <a:avLst/>
@@ -3799,48 +3519,13 @@
           <a:p>
             <a:pPr algn="ctr"/>
             <a:r>
-              <a:rPr sz="4400" b="1" i="0">
+              <a:rPr sz="4800" b="1" i="0">
                 <a:solidFill>
                   <a:srgbClr val="FFFFFF"/>
                 </a:solidFill>
                 <a:latin typeface="Arial"/>
               </a:rPr>
               <a:t>Ó vinde adoremos, Cristo Senhor</a:t>
-            </a:r>
-          </a:p>
-        </p:txBody>
-      </p:sp>
-      <p:sp>
-        <p:nvSpPr>
-          <p:cNvPr id="3" name="TextBox 2"/>
-          <p:cNvSpPr txBox="1"/>
-          <p:nvPr/>
-        </p:nvSpPr>
-        <p:spPr>
-          <a:xfrm>
-            <a:off x="594360" y="3616452"/>
-            <a:ext cx="11002975" cy="347472"/>
-          </a:xfrm>
-          <a:prstGeom prst="rect">
-            <a:avLst/>
-          </a:prstGeom>
-          <a:noFill/>
-        </p:spPr>
-        <p:txBody>
-          <a:bodyPr wrap="square">
-            <a:spAutoFit/>
-          </a:bodyPr>
-          <a:lstStyle/>
-          <a:p>
-            <a:pPr algn="ctr"/>
-            <a:r>
-              <a:rPr sz="2200" b="0" i="1">
-                <a:solidFill>
-                  <a:srgbClr val="8C8C8C"/>
-                </a:solidFill>
-                <a:latin typeface="Arial"/>
-              </a:rPr>
-              <a:t/>
             </a:r>
           </a:p>
         </p:txBody>
@@ -3879,8 +3564,8 @@
         </p:nvSpPr>
         <p:spPr>
           <a:xfrm>
-            <a:off x="594360" y="2258568"/>
-            <a:ext cx="11002975" cy="685800"/>
+            <a:off x="640080" y="2052828"/>
+            <a:ext cx="10911535" cy="731520"/>
           </a:xfrm>
           <a:prstGeom prst="rect">
             <a:avLst/>
@@ -3895,7 +3580,7 @@
           <a:p>
             <a:pPr algn="ctr"/>
             <a:r>
-              <a:rPr sz="4400" b="1" i="0">
+              <a:rPr sz="4800" b="1" i="0">
                 <a:solidFill>
                   <a:srgbClr val="FFFFFF"/>
                 </a:solidFill>
@@ -3914,8 +3599,8 @@
         </p:nvSpPr>
         <p:spPr>
           <a:xfrm>
-            <a:off x="594360" y="2980944"/>
-            <a:ext cx="11002975" cy="347472"/>
+            <a:off x="640080" y="2985516"/>
+            <a:ext cx="10911535" cy="731520"/>
           </a:xfrm>
           <a:prstGeom prst="rect">
             <a:avLst/>
@@ -3930,83 +3615,13 @@
           <a:p>
             <a:pPr algn="ctr"/>
             <a:r>
-              <a:rPr sz="2200" b="0" i="1">
-                <a:solidFill>
-                  <a:srgbClr val="8C8C8C"/>
-                </a:solidFill>
-                <a:latin typeface="Arial"/>
-              </a:rPr>
-              <a:t/>
-            </a:r>
-          </a:p>
-        </p:txBody>
-      </p:sp>
-      <p:sp>
-        <p:nvSpPr>
-          <p:cNvPr id="4" name="TextBox 3"/>
-          <p:cNvSpPr txBox="1"/>
-          <p:nvPr/>
-        </p:nvSpPr>
-        <p:spPr>
-          <a:xfrm>
-            <a:off x="594360" y="3529584"/>
-            <a:ext cx="11002975" cy="685800"/>
-          </a:xfrm>
-          <a:prstGeom prst="rect">
-            <a:avLst/>
-          </a:prstGeom>
-          <a:noFill/>
-        </p:spPr>
-        <p:txBody>
-          <a:bodyPr wrap="square">
-            <a:spAutoFit/>
-          </a:bodyPr>
-          <a:lstStyle/>
-          <a:p>
-            <a:pPr algn="ctr"/>
-            <a:r>
-              <a:rPr sz="3911" b="1" i="0">
+              <a:rPr sz="4200" b="1" i="0">
                 <a:solidFill>
                   <a:srgbClr val="FFFFFF"/>
                 </a:solidFill>
                 <a:latin typeface="Arial"/>
               </a:rPr>
               <a:t>Paz chegou, o nosso Rei está conosco</a:t>
-            </a:r>
-          </a:p>
-        </p:txBody>
-      </p:sp>
-      <p:sp>
-        <p:nvSpPr>
-          <p:cNvPr id="5" name="TextBox 4"/>
-          <p:cNvSpPr txBox="1"/>
-          <p:nvPr/>
-        </p:nvSpPr>
-        <p:spPr>
-          <a:xfrm>
-            <a:off x="594360" y="4251960"/>
-            <a:ext cx="11002975" cy="347472"/>
-          </a:xfrm>
-          <a:prstGeom prst="rect">
-            <a:avLst/>
-          </a:prstGeom>
-          <a:noFill/>
-        </p:spPr>
-        <p:txBody>
-          <a:bodyPr wrap="square">
-            <a:spAutoFit/>
-          </a:bodyPr>
-          <a:lstStyle/>
-          <a:p>
-            <a:pPr algn="ctr"/>
-            <a:r>
-              <a:rPr sz="2200" b="0" i="1">
-                <a:solidFill>
-                  <a:srgbClr val="8C8C8C"/>
-                </a:solidFill>
-                <a:latin typeface="Arial"/>
-              </a:rPr>
-              <a:t/>
             </a:r>
           </a:p>
         </p:txBody>
@@ -4045,8 +3660,8 @@
         </p:nvSpPr>
         <p:spPr>
           <a:xfrm>
-            <a:off x="594360" y="2258568"/>
-            <a:ext cx="11002975" cy="685800"/>
+            <a:off x="640080" y="2052828"/>
+            <a:ext cx="10911535" cy="731520"/>
           </a:xfrm>
           <a:prstGeom prst="rect">
             <a:avLst/>
@@ -4061,7 +3676,7 @@
           <a:p>
             <a:pPr algn="ctr"/>
             <a:r>
-              <a:rPr sz="4400" b="1" i="0">
+              <a:rPr sz="4800" b="1" i="0">
                 <a:solidFill>
                   <a:srgbClr val="FFFFFF"/>
                 </a:solidFill>
@@ -4080,8 +3695,8 @@
         </p:nvSpPr>
         <p:spPr>
           <a:xfrm>
-            <a:off x="594360" y="2980944"/>
-            <a:ext cx="11002975" cy="347472"/>
+            <a:off x="640080" y="2985516"/>
+            <a:ext cx="10911535" cy="731520"/>
           </a:xfrm>
           <a:prstGeom prst="rect">
             <a:avLst/>
@@ -4096,83 +3711,13 @@
           <a:p>
             <a:pPr algn="ctr"/>
             <a:r>
-              <a:rPr sz="2200" b="0" i="1">
-                <a:solidFill>
-                  <a:srgbClr val="8C8C8C"/>
-                </a:solidFill>
-                <a:latin typeface="Arial"/>
-              </a:rPr>
-              <a:t/>
-            </a:r>
-          </a:p>
-        </p:txBody>
-      </p:sp>
-      <p:sp>
-        <p:nvSpPr>
-          <p:cNvPr id="4" name="TextBox 3"/>
-          <p:cNvSpPr txBox="1"/>
-          <p:nvPr/>
-        </p:nvSpPr>
-        <p:spPr>
-          <a:xfrm>
-            <a:off x="594360" y="3529584"/>
-            <a:ext cx="11002975" cy="685800"/>
-          </a:xfrm>
-          <a:prstGeom prst="rect">
-            <a:avLst/>
-          </a:prstGeom>
-          <a:noFill/>
-        </p:spPr>
-        <p:txBody>
-          <a:bodyPr wrap="square">
-            <a:spAutoFit/>
-          </a:bodyPr>
-          <a:lstStyle/>
-          <a:p>
-            <a:pPr algn="ctr"/>
-            <a:r>
-              <a:rPr sz="4141" b="1" i="0">
+              <a:rPr sz="4500" b="1" i="0">
                 <a:solidFill>
                   <a:srgbClr val="FFFFFF"/>
                 </a:solidFill>
                 <a:latin typeface="Arial"/>
               </a:rPr>
               <a:t>Ó vinde adoremos, Cristo, o Senhor</a:t>
-            </a:r>
-          </a:p>
-        </p:txBody>
-      </p:sp>
-      <p:sp>
-        <p:nvSpPr>
-          <p:cNvPr id="5" name="TextBox 4"/>
-          <p:cNvSpPr txBox="1"/>
-          <p:nvPr/>
-        </p:nvSpPr>
-        <p:spPr>
-          <a:xfrm>
-            <a:off x="594360" y="4251960"/>
-            <a:ext cx="11002975" cy="347472"/>
-          </a:xfrm>
-          <a:prstGeom prst="rect">
-            <a:avLst/>
-          </a:prstGeom>
-          <a:noFill/>
-        </p:spPr>
-        <p:txBody>
-          <a:bodyPr wrap="square">
-            <a:spAutoFit/>
-          </a:bodyPr>
-          <a:lstStyle/>
-          <a:p>
-            <a:pPr algn="ctr"/>
-            <a:r>
-              <a:rPr sz="2200" b="0" i="1">
-                <a:solidFill>
-                  <a:srgbClr val="8C8C8C"/>
-                </a:solidFill>
-                <a:latin typeface="Arial"/>
-              </a:rPr>
-              <a:t/>
             </a:r>
           </a:p>
         </p:txBody>
@@ -4211,8 +3756,8 @@
         </p:nvSpPr>
         <p:spPr>
           <a:xfrm>
-            <a:off x="594360" y="2894076"/>
-            <a:ext cx="11002975" cy="685800"/>
+            <a:off x="640080" y="2702052"/>
+            <a:ext cx="10911535" cy="731520"/>
           </a:xfrm>
           <a:prstGeom prst="rect">
             <a:avLst/>
@@ -4227,48 +3772,13 @@
           <a:p>
             <a:pPr algn="ctr"/>
             <a:r>
-              <a:rPr sz="4400" b="1" i="0">
+              <a:rPr sz="4800" b="1" i="0">
                 <a:solidFill>
                   <a:srgbClr val="FFFFFF"/>
                 </a:solidFill>
                 <a:latin typeface="Arial"/>
               </a:rPr>
               <a:t>Ó vinde adoremos, Cristo Senhor</a:t>
-            </a:r>
-          </a:p>
-        </p:txBody>
-      </p:sp>
-      <p:sp>
-        <p:nvSpPr>
-          <p:cNvPr id="3" name="TextBox 2"/>
-          <p:cNvSpPr txBox="1"/>
-          <p:nvPr/>
-        </p:nvSpPr>
-        <p:spPr>
-          <a:xfrm>
-            <a:off x="594360" y="3616452"/>
-            <a:ext cx="11002975" cy="347472"/>
-          </a:xfrm>
-          <a:prstGeom prst="rect">
-            <a:avLst/>
-          </a:prstGeom>
-          <a:noFill/>
-        </p:spPr>
-        <p:txBody>
-          <a:bodyPr wrap="square">
-            <a:spAutoFit/>
-          </a:bodyPr>
-          <a:lstStyle/>
-          <a:p>
-            <a:pPr algn="ctr"/>
-            <a:r>
-              <a:rPr sz="2200" b="0" i="1">
-                <a:solidFill>
-                  <a:srgbClr val="8C8C8C"/>
-                </a:solidFill>
-                <a:latin typeface="Arial"/>
-              </a:rPr>
-              <a:t/>
             </a:r>
           </a:p>
         </p:txBody>
@@ -4307,8 +3817,8 @@
         </p:nvSpPr>
         <p:spPr>
           <a:xfrm>
-            <a:off x="594360" y="2258568"/>
-            <a:ext cx="11002975" cy="685800"/>
+            <a:off x="640080" y="2052828"/>
+            <a:ext cx="10911535" cy="731520"/>
           </a:xfrm>
           <a:prstGeom prst="rect">
             <a:avLst/>
@@ -4323,7 +3833,7 @@
           <a:p>
             <a:pPr algn="ctr"/>
             <a:r>
-              <a:rPr sz="4141" b="1" i="0">
+              <a:rPr sz="4500" b="1" i="0">
                 <a:solidFill>
                   <a:srgbClr val="FFFFFF"/>
                 </a:solidFill>
@@ -4342,8 +3852,8 @@
         </p:nvSpPr>
         <p:spPr>
           <a:xfrm>
-            <a:off x="594360" y="2980944"/>
-            <a:ext cx="11002975" cy="347472"/>
+            <a:off x="640080" y="2985516"/>
+            <a:ext cx="10911535" cy="731520"/>
           </a:xfrm>
           <a:prstGeom prst="rect">
             <a:avLst/>
@@ -4358,83 +3868,13 @@
           <a:p>
             <a:pPr algn="ctr"/>
             <a:r>
-              <a:rPr sz="2200" b="0" i="1">
-                <a:solidFill>
-                  <a:srgbClr val="8C8C8C"/>
-                </a:solidFill>
-                <a:latin typeface="Arial"/>
-              </a:rPr>
-              <a:t/>
-            </a:r>
-          </a:p>
-        </p:txBody>
-      </p:sp>
-      <p:sp>
-        <p:nvSpPr>
-          <p:cNvPr id="4" name="TextBox 3"/>
-          <p:cNvSpPr txBox="1"/>
-          <p:nvPr/>
-        </p:nvSpPr>
-        <p:spPr>
-          <a:xfrm>
-            <a:off x="594360" y="3529584"/>
-            <a:ext cx="11002975" cy="685800"/>
-          </a:xfrm>
-          <a:prstGeom prst="rect">
-            <a:avLst/>
-          </a:prstGeom>
-          <a:noFill/>
-        </p:spPr>
-        <p:txBody>
-          <a:bodyPr wrap="square">
-            <a:spAutoFit/>
-          </a:bodyPr>
-          <a:lstStyle/>
-          <a:p>
-            <a:pPr algn="ctr"/>
-            <a:r>
-              <a:rPr sz="4400" b="1" i="0">
+              <a:rPr sz="4800" b="1" i="0">
                 <a:solidFill>
                   <a:srgbClr val="FFFFFF"/>
                 </a:solidFill>
                 <a:latin typeface="Arial"/>
               </a:rPr>
               <a:t>A Palavra de Deus se fez carne</a:t>
-            </a:r>
-          </a:p>
-        </p:txBody>
-      </p:sp>
-      <p:sp>
-        <p:nvSpPr>
-          <p:cNvPr id="5" name="TextBox 4"/>
-          <p:cNvSpPr txBox="1"/>
-          <p:nvPr/>
-        </p:nvSpPr>
-        <p:spPr>
-          <a:xfrm>
-            <a:off x="594360" y="4251960"/>
-            <a:ext cx="11002975" cy="347472"/>
-          </a:xfrm>
-          <a:prstGeom prst="rect">
-            <a:avLst/>
-          </a:prstGeom>
-          <a:noFill/>
-        </p:spPr>
-        <p:txBody>
-          <a:bodyPr wrap="square">
-            <a:spAutoFit/>
-          </a:bodyPr>
-          <a:lstStyle/>
-          <a:p>
-            <a:pPr algn="ctr"/>
-            <a:r>
-              <a:rPr sz="2200" b="0" i="1">
-                <a:solidFill>
-                  <a:srgbClr val="8C8C8C"/>
-                </a:solidFill>
-                <a:latin typeface="Arial"/>
-              </a:rPr>
-              <a:t/>
             </a:r>
           </a:p>
         </p:txBody>
@@ -4473,8 +3913,8 @@
         </p:nvSpPr>
         <p:spPr>
           <a:xfrm>
-            <a:off x="594360" y="2258568"/>
-            <a:ext cx="11002975" cy="685800"/>
+            <a:off x="640080" y="2052828"/>
+            <a:ext cx="10911535" cy="731520"/>
           </a:xfrm>
           <a:prstGeom prst="rect">
             <a:avLst/>
@@ -4489,7 +3929,7 @@
           <a:p>
             <a:pPr algn="ctr"/>
             <a:r>
-              <a:rPr sz="4400" b="1" i="0">
+              <a:rPr sz="4800" b="1" i="0">
                 <a:solidFill>
                   <a:srgbClr val="FFFFFF"/>
                 </a:solidFill>
@@ -4508,8 +3948,8 @@
         </p:nvSpPr>
         <p:spPr>
           <a:xfrm>
-            <a:off x="594360" y="2980944"/>
-            <a:ext cx="11002975" cy="347472"/>
+            <a:off x="640080" y="2985516"/>
+            <a:ext cx="10911535" cy="731520"/>
           </a:xfrm>
           <a:prstGeom prst="rect">
             <a:avLst/>
@@ -4524,13 +3964,13 @@
           <a:p>
             <a:pPr algn="ctr"/>
             <a:r>
-              <a:rPr sz="2200" b="0" i="1">
-                <a:solidFill>
-                  <a:srgbClr val="8C8C8C"/>
+              <a:rPr sz="4800" b="1" i="0">
+                <a:solidFill>
+                  <a:srgbClr val="FFFFFF"/>
                 </a:solidFill>
                 <a:latin typeface="Arial"/>
               </a:rPr>
-              <a:t>来たりし   僕らの王</a:t>
+              <a:t>O Salvador deste mundo quebrado</a:t>
             </a:r>
           </a:p>
         </p:txBody>
@@ -4543,8 +3983,8 @@
         </p:nvSpPr>
         <p:spPr>
           <a:xfrm>
-            <a:off x="594360" y="3529584"/>
-            <a:ext cx="11002975" cy="685800"/>
+            <a:off x="640080" y="4128516"/>
+            <a:ext cx="10911535" cy="310896"/>
           </a:xfrm>
           <a:prstGeom prst="rect">
             <a:avLst/>
@@ -4559,13 +3999,13 @@
           <a:p>
             <a:pPr algn="ctr"/>
             <a:r>
-              <a:rPr sz="4400" b="1" i="0">
-                <a:solidFill>
-                  <a:srgbClr val="FFFFFF"/>
+              <a:rPr sz="2000" b="0" i="0">
+                <a:solidFill>
+                  <a:srgbClr val="828282"/>
                 </a:solidFill>
                 <a:latin typeface="Arial"/>
               </a:rPr>
-              <a:t>O Salvador deste mundo quebrado</a:t>
+              <a:t>来たりし   僕らの王</a:t>
             </a:r>
           </a:p>
         </p:txBody>
@@ -4578,8 +4018,8 @@
         </p:nvSpPr>
         <p:spPr>
           <a:xfrm>
-            <a:off x="594360" y="4251960"/>
-            <a:ext cx="11002975" cy="347472"/>
+            <a:off x="640080" y="4494276"/>
+            <a:ext cx="10911535" cy="310896"/>
           </a:xfrm>
           <a:prstGeom prst="rect">
             <a:avLst/>
@@ -4594,9 +4034,9 @@
           <a:p>
             <a:pPr algn="ctr"/>
             <a:r>
-              <a:rPr sz="2200" b="0" i="1">
-                <a:solidFill>
-                  <a:srgbClr val="8C8C8C"/>
+              <a:rPr sz="2000" b="0" i="0">
+                <a:solidFill>
+                  <a:srgbClr val="828282"/>
                 </a:solidFill>
                 <a:latin typeface="Arial"/>
               </a:rPr>
@@ -4639,8 +4079,8 @@
         </p:nvSpPr>
         <p:spPr>
           <a:xfrm>
-            <a:off x="594360" y="2258568"/>
-            <a:ext cx="11002975" cy="685800"/>
+            <a:off x="640080" y="2052828"/>
+            <a:ext cx="10911535" cy="731520"/>
           </a:xfrm>
           <a:prstGeom prst="rect">
             <a:avLst/>
@@ -4655,7 +4095,7 @@
           <a:p>
             <a:pPr algn="ctr"/>
             <a:r>
-              <a:rPr sz="4400" b="1" i="0">
+              <a:rPr sz="4800" b="1" i="0">
                 <a:solidFill>
                   <a:srgbClr val="FFFFFF"/>
                 </a:solidFill>
@@ -4674,8 +4114,8 @@
         </p:nvSpPr>
         <p:spPr>
           <a:xfrm>
-            <a:off x="594360" y="2980944"/>
-            <a:ext cx="11002975" cy="347472"/>
+            <a:off x="640080" y="2985516"/>
+            <a:ext cx="10911535" cy="731520"/>
           </a:xfrm>
           <a:prstGeom prst="rect">
             <a:avLst/>
@@ -4690,13 +4130,13 @@
           <a:p>
             <a:pPr algn="ctr"/>
             <a:r>
-              <a:rPr sz="2200" b="0" i="1">
-                <a:solidFill>
-                  <a:srgbClr val="8C8C8C"/>
+              <a:rPr sz="4800" b="1" i="0">
+                <a:solidFill>
+                  <a:srgbClr val="FFFFFF"/>
                 </a:solidFill>
                 <a:latin typeface="Arial"/>
               </a:rPr>
-              <a:t>天使と共に歌おう</a:t>
+              <a:t>Vinde, adoremos a Ele</a:t>
             </a:r>
           </a:p>
         </p:txBody>
@@ -4709,8 +4149,8 @@
         </p:nvSpPr>
         <p:spPr>
           <a:xfrm>
-            <a:off x="594360" y="3529584"/>
-            <a:ext cx="11002975" cy="685800"/>
+            <a:off x="640080" y="4128516"/>
+            <a:ext cx="10911535" cy="310896"/>
           </a:xfrm>
           <a:prstGeom prst="rect">
             <a:avLst/>
@@ -4725,48 +4165,13 @@
           <a:p>
             <a:pPr algn="ctr"/>
             <a:r>
-              <a:rPr sz="4400" b="1" i="0">
-                <a:solidFill>
-                  <a:srgbClr val="FFFFFF"/>
+              <a:rPr sz="2000" b="0" i="0">
+                <a:solidFill>
+                  <a:srgbClr val="828282"/>
                 </a:solidFill>
                 <a:latin typeface="Arial"/>
               </a:rPr>
-              <a:t>Vinde, adoremos a Ele</a:t>
-            </a:r>
-          </a:p>
-        </p:txBody>
-      </p:sp>
-      <p:sp>
-        <p:nvSpPr>
-          <p:cNvPr id="5" name="TextBox 4"/>
-          <p:cNvSpPr txBox="1"/>
-          <p:nvPr/>
-        </p:nvSpPr>
-        <p:spPr>
-          <a:xfrm>
-            <a:off x="594360" y="4251960"/>
-            <a:ext cx="11002975" cy="347472"/>
-          </a:xfrm>
-          <a:prstGeom prst="rect">
-            <a:avLst/>
-          </a:prstGeom>
-          <a:noFill/>
-        </p:spPr>
-        <p:txBody>
-          <a:bodyPr wrap="square">
-            <a:spAutoFit/>
-          </a:bodyPr>
-          <a:lstStyle/>
-          <a:p>
-            <a:pPr algn="ctr"/>
-            <a:r>
-              <a:rPr sz="2200" b="0" i="1">
-                <a:solidFill>
-                  <a:srgbClr val="8C8C8C"/>
-                </a:solidFill>
-                <a:latin typeface="Arial"/>
-              </a:rPr>
-              <a:t/>
+              <a:t>天使と共に歌おう</a:t>
             </a:r>
           </a:p>
         </p:txBody>
@@ -4805,8 +4210,8 @@
         </p:nvSpPr>
         <p:spPr>
           <a:xfrm>
-            <a:off x="594360" y="1837944"/>
-            <a:ext cx="11002975" cy="685800"/>
+            <a:off x="640080" y="1650492"/>
+            <a:ext cx="10911535" cy="731520"/>
           </a:xfrm>
           <a:prstGeom prst="rect">
             <a:avLst/>
@@ -4821,7 +4226,7 @@
           <a:p>
             <a:pPr algn="ctr"/>
             <a:r>
-              <a:rPr sz="4400" b="1" i="0">
+              <a:rPr sz="4800" b="1" i="0">
                 <a:solidFill>
                   <a:srgbClr val="FFFFFF"/>
                 </a:solidFill>
@@ -4840,8 +4245,8 @@
         </p:nvSpPr>
         <p:spPr>
           <a:xfrm>
-            <a:off x="594360" y="2560320"/>
-            <a:ext cx="11002975" cy="384048"/>
+            <a:off x="640080" y="2418588"/>
+            <a:ext cx="10911535" cy="365760"/>
           </a:xfrm>
           <a:prstGeom prst="rect">
             <a:avLst/>
@@ -4858,7 +4263,7 @@
             <a:r>
               <a:rPr sz="2400" b="0" i="1">
                 <a:solidFill>
-                  <a:srgbClr val="B4B4B4"/>
+                  <a:srgbClr val="AAAAAA"/>
                 </a:solidFill>
                 <a:latin typeface="Arial"/>
               </a:rPr>
@@ -4875,8 +4280,8 @@
         </p:nvSpPr>
         <p:spPr>
           <a:xfrm>
-            <a:off x="594360" y="2980944"/>
-            <a:ext cx="11002975" cy="347472"/>
+            <a:off x="640080" y="2985516"/>
+            <a:ext cx="10911535" cy="731520"/>
           </a:xfrm>
           <a:prstGeom prst="rect">
             <a:avLst/>
@@ -4891,13 +4296,13 @@
           <a:p>
             <a:pPr algn="ctr"/>
             <a:r>
-              <a:rPr sz="2000" b="0" i="1">
-                <a:solidFill>
-                  <a:srgbClr val="8C8C8C"/>
+              <a:rPr sz="4800" b="1" i="0">
+                <a:solidFill>
+                  <a:srgbClr val="FFFFFF"/>
                 </a:solidFill>
                 <a:latin typeface="Arial"/>
               </a:rPr>
-              <a:t/>
+              <a:t>すべての    人のため</a:t>
             </a:r>
           </a:p>
         </p:txBody>
@@ -4910,8 +4315,8 @@
         </p:nvSpPr>
         <p:spPr>
           <a:xfrm>
-            <a:off x="594360" y="3529584"/>
-            <a:ext cx="11002975" cy="685800"/>
+            <a:off x="640080" y="3753612"/>
+            <a:ext cx="10911535" cy="365760"/>
           </a:xfrm>
           <a:prstGeom prst="rect">
             <a:avLst/>
@@ -4926,13 +4331,13 @@
           <a:p>
             <a:pPr algn="ctr"/>
             <a:r>
-              <a:rPr sz="4400" b="1" i="0">
-                <a:solidFill>
-                  <a:srgbClr val="FFFFFF"/>
+              <a:rPr sz="2400" b="0" i="1">
+                <a:solidFill>
+                  <a:srgbClr val="AAAAAA"/>
                 </a:solidFill>
                 <a:latin typeface="Arial"/>
               </a:rPr>
-              <a:t>すべての    人のため</a:t>
+              <a:t>subete no hito no tame</a:t>
             </a:r>
           </a:p>
         </p:txBody>
@@ -4945,8 +4350,8 @@
         </p:nvSpPr>
         <p:spPr>
           <a:xfrm>
-            <a:off x="594360" y="4251960"/>
-            <a:ext cx="11002975" cy="384048"/>
+            <a:off x="640080" y="4530852"/>
+            <a:ext cx="10911535" cy="310896"/>
           </a:xfrm>
           <a:prstGeom prst="rect">
             <a:avLst/>
@@ -4961,13 +4366,13 @@
           <a:p>
             <a:pPr algn="ctr"/>
             <a:r>
-              <a:rPr sz="2400" b="0" i="1">
-                <a:solidFill>
-                  <a:srgbClr val="B4B4B4"/>
+              <a:rPr sz="2000" b="0" i="1">
+                <a:solidFill>
+                  <a:srgbClr val="828282"/>
                 </a:solidFill>
                 <a:latin typeface="Arial"/>
               </a:rPr>
-              <a:t>subete no hito no tame</a:t>
+              <a:t>Paz Chegou</a:t>
             </a:r>
           </a:p>
         </p:txBody>
@@ -4980,8 +4385,8 @@
         </p:nvSpPr>
         <p:spPr>
           <a:xfrm>
-            <a:off x="594360" y="4672584"/>
-            <a:ext cx="11002975" cy="347472"/>
+            <a:off x="640080" y="4896612"/>
+            <a:ext cx="10911535" cy="310896"/>
           </a:xfrm>
           <a:prstGeom prst="rect">
             <a:avLst/>
@@ -4998,11 +4403,11 @@
             <a:r>
               <a:rPr sz="2000" b="0" i="1">
                 <a:solidFill>
-                  <a:srgbClr val="8C8C8C"/>
+                  <a:srgbClr val="828282"/>
                 </a:solidFill>
                 <a:latin typeface="Arial"/>
               </a:rPr>
-              <a:t/>
+              <a:t>Paz chegou</a:t>
             </a:r>
           </a:p>
         </p:txBody>
@@ -5041,8 +4446,8 @@
         </p:nvSpPr>
         <p:spPr>
           <a:xfrm>
-            <a:off x="594360" y="1837944"/>
-            <a:ext cx="11002975" cy="685800"/>
+            <a:off x="640080" y="1650492"/>
+            <a:ext cx="10911535" cy="731520"/>
           </a:xfrm>
           <a:prstGeom prst="rect">
             <a:avLst/>
@@ -5057,7 +4462,7 @@
           <a:p>
             <a:pPr algn="ctr"/>
             <a:r>
-              <a:rPr sz="4400" b="1" i="0">
+              <a:rPr sz="4800" b="1" i="0">
                 <a:solidFill>
                   <a:srgbClr val="FFFFFF"/>
                 </a:solidFill>
@@ -5076,8 +4481,8 @@
         </p:nvSpPr>
         <p:spPr>
           <a:xfrm>
-            <a:off x="594360" y="2560320"/>
-            <a:ext cx="11002975" cy="384048"/>
+            <a:off x="640080" y="2418588"/>
+            <a:ext cx="10911535" cy="365760"/>
           </a:xfrm>
           <a:prstGeom prst="rect">
             <a:avLst/>
@@ -5094,7 +4499,7 @@
             <a:r>
               <a:rPr sz="2400" b="0" i="1">
                 <a:solidFill>
-                  <a:srgbClr val="B4B4B4"/>
+                  <a:srgbClr val="AAAAAA"/>
                 </a:solidFill>
                 <a:latin typeface="Arial"/>
               </a:rPr>
@@ -5111,8 +4516,8 @@
         </p:nvSpPr>
         <p:spPr>
           <a:xfrm>
-            <a:off x="594360" y="2980944"/>
-            <a:ext cx="11002975" cy="347472"/>
+            <a:off x="640080" y="2985516"/>
+            <a:ext cx="10911535" cy="731520"/>
           </a:xfrm>
           <a:prstGeom prst="rect">
             <a:avLst/>
@@ -5127,13 +4532,13 @@
           <a:p>
             <a:pPr algn="ctr"/>
             <a:r>
-              <a:rPr sz="2000" b="0" i="1">
-                <a:solidFill>
-                  <a:srgbClr val="8C8C8C"/>
+              <a:rPr sz="4800" b="1" i="0">
+                <a:solidFill>
+                  <a:srgbClr val="FFFFFF"/>
                 </a:solidFill>
                 <a:latin typeface="Arial"/>
               </a:rPr>
-              <a:t/>
+              <a:t>賛美を   イエスに</a:t>
             </a:r>
           </a:p>
         </p:txBody>
@@ -5146,8 +4551,8 @@
         </p:nvSpPr>
         <p:spPr>
           <a:xfrm>
-            <a:off x="594360" y="3529584"/>
-            <a:ext cx="11002975" cy="685800"/>
+            <a:off x="640080" y="3753612"/>
+            <a:ext cx="10911535" cy="365760"/>
           </a:xfrm>
           <a:prstGeom prst="rect">
             <a:avLst/>
@@ -5162,13 +4567,13 @@
           <a:p>
             <a:pPr algn="ctr"/>
             <a:r>
-              <a:rPr sz="4400" b="1" i="0">
-                <a:solidFill>
-                  <a:srgbClr val="FFFFFF"/>
+              <a:rPr sz="2400" b="0" i="1">
+                <a:solidFill>
+                  <a:srgbClr val="AAAAAA"/>
                 </a:solidFill>
                 <a:latin typeface="Arial"/>
               </a:rPr>
-              <a:t>賛美を   イエスに</a:t>
+              <a:t>sanbi wo   iesu ni</a:t>
             </a:r>
           </a:p>
         </p:txBody>
@@ -5181,8 +4586,8 @@
         </p:nvSpPr>
         <p:spPr>
           <a:xfrm>
-            <a:off x="594360" y="4251960"/>
-            <a:ext cx="11002975" cy="384048"/>
+            <a:off x="640080" y="4530852"/>
+            <a:ext cx="10911535" cy="310896"/>
           </a:xfrm>
           <a:prstGeom prst="rect">
             <a:avLst/>
@@ -5197,13 +4602,13 @@
           <a:p>
             <a:pPr algn="ctr"/>
             <a:r>
-              <a:rPr sz="2400" b="0" i="1">
-                <a:solidFill>
-                  <a:srgbClr val="B4B4B4"/>
+              <a:rPr sz="2000" b="0" i="1">
+                <a:solidFill>
+                  <a:srgbClr val="828282"/>
                 </a:solidFill>
                 <a:latin typeface="Arial"/>
               </a:rPr>
-              <a:t>sanbi wo   iesu ni</a:t>
+              <a:t>Eis que a estrela de Belém brilhou</a:t>
             </a:r>
           </a:p>
         </p:txBody>
@@ -5216,8 +4621,8 @@
         </p:nvSpPr>
         <p:spPr>
           <a:xfrm>
-            <a:off x="594360" y="4672584"/>
-            <a:ext cx="11002975" cy="347472"/>
+            <a:off x="640080" y="4896612"/>
+            <a:ext cx="10911535" cy="310896"/>
           </a:xfrm>
           <a:prstGeom prst="rect">
             <a:avLst/>
@@ -5234,11 +4639,11 @@
             <a:r>
               <a:rPr sz="2000" b="0" i="1">
                 <a:solidFill>
-                  <a:srgbClr val="8C8C8C"/>
+                  <a:srgbClr val="828282"/>
                 </a:solidFill>
                 <a:latin typeface="Arial"/>
               </a:rPr>
-              <a:t/>
+              <a:t>A Palavra de Deus se fez carne</a:t>
             </a:r>
           </a:p>
         </p:txBody>
@@ -5277,8 +4682,8 @@
         </p:nvSpPr>
         <p:spPr>
           <a:xfrm>
-            <a:off x="594360" y="1837944"/>
-            <a:ext cx="11002975" cy="685800"/>
+            <a:off x="640080" y="1650492"/>
+            <a:ext cx="10911535" cy="731520"/>
           </a:xfrm>
           <a:prstGeom prst="rect">
             <a:avLst/>
@@ -5293,7 +4698,7 @@
           <a:p>
             <a:pPr algn="ctr"/>
             <a:r>
-              <a:rPr sz="4400" b="1" i="0">
+              <a:rPr sz="4800" b="1" i="0">
                 <a:solidFill>
                   <a:srgbClr val="FFFFFF"/>
                 </a:solidFill>
@@ -5312,8 +4717,8 @@
         </p:nvSpPr>
         <p:spPr>
           <a:xfrm>
-            <a:off x="594360" y="2560320"/>
-            <a:ext cx="11002975" cy="384048"/>
+            <a:off x="640080" y="2418588"/>
+            <a:ext cx="10911535" cy="365760"/>
           </a:xfrm>
           <a:prstGeom prst="rect">
             <a:avLst/>
@@ -5330,7 +4735,7 @@
             <a:r>
               <a:rPr sz="2400" b="0" i="1">
                 <a:solidFill>
-                  <a:srgbClr val="B4B4B4"/>
+                  <a:srgbClr val="AAAAAA"/>
                 </a:solidFill>
                 <a:latin typeface="Arial"/>
               </a:rPr>
@@ -5347,8 +4752,8 @@
         </p:nvSpPr>
         <p:spPr>
           <a:xfrm>
-            <a:off x="594360" y="2980944"/>
-            <a:ext cx="11002975" cy="347472"/>
+            <a:off x="640080" y="2985516"/>
+            <a:ext cx="10911535" cy="731520"/>
           </a:xfrm>
           <a:prstGeom prst="rect">
             <a:avLst/>
@@ -5363,13 +4768,13 @@
           <a:p>
             <a:pPr algn="ctr"/>
             <a:r>
-              <a:rPr sz="2000" b="0" i="1">
-                <a:solidFill>
-                  <a:srgbClr val="8C8C8C"/>
+              <a:rPr sz="4800" b="1" i="0">
+                <a:solidFill>
+                  <a:srgbClr val="FFFFFF"/>
                 </a:solidFill>
                 <a:latin typeface="Arial"/>
               </a:rPr>
-              <a:t>Para nós uma criança nasceu</a:t>
+              <a:t>へいあんもたらす</a:t>
             </a:r>
           </a:p>
         </p:txBody>
@@ -5382,8 +4787,8 @@
         </p:nvSpPr>
         <p:spPr>
           <a:xfrm>
-            <a:off x="594360" y="3529584"/>
-            <a:ext cx="11002975" cy="685800"/>
+            <a:off x="640080" y="3753612"/>
+            <a:ext cx="10911535" cy="365760"/>
           </a:xfrm>
           <a:prstGeom prst="rect">
             <a:avLst/>
@@ -5398,13 +4803,13 @@
           <a:p>
             <a:pPr algn="ctr"/>
             <a:r>
-              <a:rPr sz="4400" b="1" i="0">
-                <a:solidFill>
-                  <a:srgbClr val="FFFFFF"/>
+              <a:rPr sz="2400" b="0" i="1">
+                <a:solidFill>
+                  <a:srgbClr val="AAAAAA"/>
                 </a:solidFill>
                 <a:latin typeface="Arial"/>
               </a:rPr>
-              <a:t>へいあんもたらす</a:t>
+              <a:t>heian motarasu</a:t>
             </a:r>
           </a:p>
         </p:txBody>
@@ -5417,8 +4822,8 @@
         </p:nvSpPr>
         <p:spPr>
           <a:xfrm>
-            <a:off x="594360" y="4251960"/>
-            <a:ext cx="11002975" cy="384048"/>
+            <a:off x="640080" y="4530852"/>
+            <a:ext cx="10911535" cy="310896"/>
           </a:xfrm>
           <a:prstGeom prst="rect">
             <a:avLst/>
@@ -5433,13 +4838,13 @@
           <a:p>
             <a:pPr algn="ctr"/>
             <a:r>
-              <a:rPr sz="2400" b="0" i="1">
-                <a:solidFill>
-                  <a:srgbClr val="B4B4B4"/>
+              <a:rPr sz="2000" b="0" i="1">
+                <a:solidFill>
+                  <a:srgbClr val="828282"/>
                 </a:solidFill>
                 <a:latin typeface="Arial"/>
               </a:rPr>
-              <a:t>heian motarasu</a:t>
+              <a:t>Para nós uma criança nasceu</a:t>
             </a:r>
           </a:p>
         </p:txBody>
@@ -5452,8 +4857,8 @@
         </p:nvSpPr>
         <p:spPr>
           <a:xfrm>
-            <a:off x="594360" y="4672584"/>
-            <a:ext cx="11002975" cy="347472"/>
+            <a:off x="640080" y="4896612"/>
+            <a:ext cx="10911535" cy="310896"/>
           </a:xfrm>
           <a:prstGeom prst="rect">
             <a:avLst/>
@@ -5470,7 +4875,7 @@
             <a:r>
               <a:rPr sz="2000" b="0" i="1">
                 <a:solidFill>
-                  <a:srgbClr val="8C8C8C"/>
+                  <a:srgbClr val="828282"/>
                 </a:solidFill>
                 <a:latin typeface="Arial"/>
               </a:rPr>
@@ -5513,8 +4918,8 @@
         </p:nvSpPr>
         <p:spPr>
           <a:xfrm>
-            <a:off x="594360" y="2683764"/>
-            <a:ext cx="11002975" cy="685800"/>
+            <a:off x="640080" y="2500884"/>
+            <a:ext cx="10911535" cy="731520"/>
           </a:xfrm>
           <a:prstGeom prst="rect">
             <a:avLst/>
@@ -5529,7 +4934,7 @@
           <a:p>
             <a:pPr algn="ctr"/>
             <a:r>
-              <a:rPr sz="4400" b="1" i="0">
+              <a:rPr sz="4800" b="1" i="0">
                 <a:solidFill>
                   <a:srgbClr val="FFFFFF"/>
                 </a:solidFill>
@@ -5548,8 +4953,8 @@
         </p:nvSpPr>
         <p:spPr>
           <a:xfrm>
-            <a:off x="594360" y="3406140"/>
-            <a:ext cx="11002975" cy="384048"/>
+            <a:off x="640080" y="3268980"/>
+            <a:ext cx="10911535" cy="365760"/>
           </a:xfrm>
           <a:prstGeom prst="rect">
             <a:avLst/>
@@ -5566,7 +4971,7 @@
             <a:r>
               <a:rPr sz="2400" b="0" i="1">
                 <a:solidFill>
-                  <a:srgbClr val="B4B4B4"/>
+                  <a:srgbClr val="AAAAAA"/>
                 </a:solidFill>
                 <a:latin typeface="Arial"/>
               </a:rPr>
@@ -5583,8 +4988,8 @@
         </p:nvSpPr>
         <p:spPr>
           <a:xfrm>
-            <a:off x="594360" y="3826764"/>
-            <a:ext cx="11002975" cy="347472"/>
+            <a:off x="640080" y="4046220"/>
+            <a:ext cx="10911535" cy="310896"/>
           </a:xfrm>
           <a:prstGeom prst="rect">
             <a:avLst/>
@@ -5601,7 +5006,7 @@
             <a:r>
               <a:rPr sz="2000" b="0" i="1">
                 <a:solidFill>
-                  <a:srgbClr val="8C8C8C"/>
+                  <a:srgbClr val="828282"/>
                 </a:solidFill>
                 <a:latin typeface="Arial"/>
               </a:rPr>
@@ -5644,8 +5049,8 @@
         </p:nvSpPr>
         <p:spPr>
           <a:xfrm>
-            <a:off x="594360" y="2258568"/>
-            <a:ext cx="11002975" cy="685800"/>
+            <a:off x="640080" y="2052828"/>
+            <a:ext cx="10911535" cy="731520"/>
           </a:xfrm>
           <a:prstGeom prst="rect">
             <a:avLst/>
@@ -5660,7 +5065,7 @@
           <a:p>
             <a:pPr algn="ctr"/>
             <a:r>
-              <a:rPr sz="3805" b="1" i="0">
+              <a:rPr sz="4100" b="1" i="0">
                 <a:solidFill>
                   <a:srgbClr val="FFFFFF"/>
                 </a:solidFill>
@@ -5679,8 +5084,8 @@
         </p:nvSpPr>
         <p:spPr>
           <a:xfrm>
-            <a:off x="594360" y="2980944"/>
-            <a:ext cx="11002975" cy="347472"/>
+            <a:off x="640080" y="2985516"/>
+            <a:ext cx="10911535" cy="731520"/>
           </a:xfrm>
           <a:prstGeom prst="rect">
             <a:avLst/>
@@ -5695,83 +5100,13 @@
           <a:p>
             <a:pPr algn="ctr"/>
             <a:r>
-              <a:rPr sz="2200" b="0" i="1">
-                <a:solidFill>
-                  <a:srgbClr val="8C8C8C"/>
-                </a:solidFill>
-                <a:latin typeface="Arial"/>
-              </a:rPr>
-              <a:t/>
-            </a:r>
-          </a:p>
-        </p:txBody>
-      </p:sp>
-      <p:sp>
-        <p:nvSpPr>
-          <p:cNvPr id="4" name="TextBox 3"/>
-          <p:cNvSpPr txBox="1"/>
-          <p:nvPr/>
-        </p:nvSpPr>
-        <p:spPr>
-          <a:xfrm>
-            <a:off x="594360" y="3529584"/>
-            <a:ext cx="11002975" cy="685800"/>
-          </a:xfrm>
-          <a:prstGeom prst="rect">
-            <a:avLst/>
-          </a:prstGeom>
-          <a:noFill/>
-        </p:spPr>
-        <p:txBody>
-          <a:bodyPr wrap="square">
-            <a:spAutoFit/>
-          </a:bodyPr>
-          <a:lstStyle/>
-          <a:p>
-            <a:pPr algn="ctr"/>
-            <a:r>
-              <a:rPr sz="4022" b="1" i="0">
+              <a:rPr sz="4300" b="1" i="0">
                 <a:solidFill>
                   <a:srgbClr val="FFFFFF"/>
                 </a:solidFill>
                 <a:latin typeface="Arial"/>
               </a:rPr>
               <a:t>Ele reina com amor no trono de Davi</a:t>
-            </a:r>
-          </a:p>
-        </p:txBody>
-      </p:sp>
-      <p:sp>
-        <p:nvSpPr>
-          <p:cNvPr id="5" name="TextBox 4"/>
-          <p:cNvSpPr txBox="1"/>
-          <p:nvPr/>
-        </p:nvSpPr>
-        <p:spPr>
-          <a:xfrm>
-            <a:off x="594360" y="4251960"/>
-            <a:ext cx="11002975" cy="347472"/>
-          </a:xfrm>
-          <a:prstGeom prst="rect">
-            <a:avLst/>
-          </a:prstGeom>
-          <a:noFill/>
-        </p:spPr>
-        <p:txBody>
-          <a:bodyPr wrap="square">
-            <a:spAutoFit/>
-          </a:bodyPr>
-          <a:lstStyle/>
-          <a:p>
-            <a:pPr algn="ctr"/>
-            <a:r>
-              <a:rPr sz="2200" b="0" i="1">
-                <a:solidFill>
-                  <a:srgbClr val="8C8C8C"/>
-                </a:solidFill>
-                <a:latin typeface="Arial"/>
-              </a:rPr>
-              <a:t/>
             </a:r>
           </a:p>
         </p:txBody>

--- a/output_pptx/Peace_Has_Come.pptx
+++ b/output_pptx/Peace_Has_Come.pptx
@@ -3181,6 +3181,76 @@
           </a:p>
         </p:txBody>
       </p:sp>
+      <p:sp>
+        <p:nvSpPr>
+          <p:cNvPr id="4" name="TextBox 3"/>
+          <p:cNvSpPr txBox="1"/>
+          <p:nvPr/>
+        </p:nvSpPr>
+        <p:spPr>
+          <a:xfrm>
+            <a:off x="640080" y="4128516"/>
+            <a:ext cx="10911535" cy="310896"/>
+          </a:xfrm>
+          <a:prstGeom prst="rect">
+            <a:avLst/>
+          </a:prstGeom>
+          <a:noFill/>
+        </p:spPr>
+        <p:txBody>
+          <a:bodyPr wrap="square">
+            <a:spAutoFit/>
+          </a:bodyPr>
+          <a:lstStyle/>
+          <a:p>
+            <a:pPr algn="ctr"/>
+            <a:r>
+              <a:rPr sz="2000" b="0" i="0">
+                <a:solidFill>
+                  <a:srgbClr val="828282"/>
+                </a:solidFill>
+                <a:latin typeface="Arial"/>
+              </a:rPr>
+              <a:t>平和が来た</a:t>
+            </a:r>
+          </a:p>
+        </p:txBody>
+      </p:sp>
+      <p:sp>
+        <p:nvSpPr>
+          <p:cNvPr id="5" name="TextBox 4"/>
+          <p:cNvSpPr txBox="1"/>
+          <p:nvPr/>
+        </p:nvSpPr>
+        <p:spPr>
+          <a:xfrm>
+            <a:off x="640080" y="4494276"/>
+            <a:ext cx="10911535" cy="310896"/>
+          </a:xfrm>
+          <a:prstGeom prst="rect">
+            <a:avLst/>
+          </a:prstGeom>
+          <a:noFill/>
+        </p:spPr>
+        <p:txBody>
+          <a:bodyPr wrap="square">
+            <a:spAutoFit/>
+          </a:bodyPr>
+          <a:lstStyle/>
+          <a:p>
+            <a:pPr algn="ctr"/>
+            <a:r>
+              <a:rPr sz="2000" b="0" i="0">
+                <a:solidFill>
+                  <a:srgbClr val="828282"/>
+                </a:solidFill>
+                <a:latin typeface="Arial"/>
+              </a:rPr>
+              <a:t>平和が来た</a:t>
+            </a:r>
+          </a:p>
+        </p:txBody>
+      </p:sp>
     </p:spTree>
   </p:cSld>
   <p:clrMapOvr>
@@ -3277,6 +3347,76 @@
           </a:p>
         </p:txBody>
       </p:sp>
+      <p:sp>
+        <p:nvSpPr>
+          <p:cNvPr id="4" name="TextBox 3"/>
+          <p:cNvSpPr txBox="1"/>
+          <p:nvPr/>
+        </p:nvSpPr>
+        <p:spPr>
+          <a:xfrm>
+            <a:off x="640080" y="4128516"/>
+            <a:ext cx="10911535" cy="310896"/>
+          </a:xfrm>
+          <a:prstGeom prst="rect">
+            <a:avLst/>
+          </a:prstGeom>
+          <a:noFill/>
+        </p:spPr>
+        <p:txBody>
+          <a:bodyPr wrap="square">
+            <a:spAutoFit/>
+          </a:bodyPr>
+          <a:lstStyle/>
+          <a:p>
+            <a:pPr algn="ctr"/>
+            <a:r>
+              <a:rPr sz="2000" b="0" i="0">
+                <a:solidFill>
+                  <a:srgbClr val="828282"/>
+                </a:solidFill>
+                <a:latin typeface="Arial"/>
+              </a:rPr>
+              <a:t>すべての栄光はキリストのものである</a:t>
+            </a:r>
+          </a:p>
+        </p:txBody>
+      </p:sp>
+      <p:sp>
+        <p:nvSpPr>
+          <p:cNvPr id="5" name="TextBox 4"/>
+          <p:cNvSpPr txBox="1"/>
+          <p:nvPr/>
+        </p:nvSpPr>
+        <p:spPr>
+          <a:xfrm>
+            <a:off x="640080" y="4494276"/>
+            <a:ext cx="10911535" cy="310896"/>
+          </a:xfrm>
+          <a:prstGeom prst="rect">
+            <a:avLst/>
+          </a:prstGeom>
+          <a:noFill/>
+        </p:spPr>
+        <p:txBody>
+          <a:bodyPr wrap="square">
+            <a:spAutoFit/>
+          </a:bodyPr>
+          <a:lstStyle/>
+          <a:p>
+            <a:pPr algn="ctr"/>
+            <a:r>
+              <a:rPr sz="2000" b="0" i="0">
+                <a:solidFill>
+                  <a:srgbClr val="828282"/>
+                </a:solidFill>
+                <a:latin typeface="Arial"/>
+              </a:rPr>
+              <a:t>聖い、聖い、聖い</a:t>
+            </a:r>
+          </a:p>
+        </p:txBody>
+      </p:sp>
     </p:spTree>
   </p:cSld>
   <p:clrMapOvr>
@@ -3373,6 +3513,76 @@
           </a:p>
         </p:txBody>
       </p:sp>
+      <p:sp>
+        <p:nvSpPr>
+          <p:cNvPr id="4" name="TextBox 3"/>
+          <p:cNvSpPr txBox="1"/>
+          <p:nvPr/>
+        </p:nvSpPr>
+        <p:spPr>
+          <a:xfrm>
+            <a:off x="640080" y="4128516"/>
+            <a:ext cx="10911535" cy="310896"/>
+          </a:xfrm>
+          <a:prstGeom prst="rect">
+            <a:avLst/>
+          </a:prstGeom>
+          <a:noFill/>
+        </p:spPr>
+        <p:txBody>
+          <a:bodyPr wrap="square">
+            <a:spAutoFit/>
+          </a:bodyPr>
+          <a:lstStyle/>
+          <a:p>
+            <a:pPr algn="ctr"/>
+            <a:r>
+              <a:rPr sz="2000" b="0" i="0">
+                <a:solidFill>
+                  <a:srgbClr val="828282"/>
+                </a:solidFill>
+                <a:latin typeface="Arial"/>
+              </a:rPr>
+              <a:t>イエスよ、私たちはあなたを礼拝します</a:t>
+            </a:r>
+          </a:p>
+        </p:txBody>
+      </p:sp>
+      <p:sp>
+        <p:nvSpPr>
+          <p:cNvPr id="5" name="TextBox 4"/>
+          <p:cNvSpPr txBox="1"/>
+          <p:nvPr/>
+        </p:nvSpPr>
+        <p:spPr>
+          <a:xfrm>
+            <a:off x="640080" y="4494276"/>
+            <a:ext cx="10911535" cy="310896"/>
+          </a:xfrm>
+          <a:prstGeom prst="rect">
+            <a:avLst/>
+          </a:prstGeom>
+          <a:noFill/>
+        </p:spPr>
+        <p:txBody>
+          <a:bodyPr wrap="square">
+            <a:spAutoFit/>
+          </a:bodyPr>
+          <a:lstStyle/>
+          <a:p>
+            <a:pPr algn="ctr"/>
+            <a:r>
+              <a:rPr sz="2000" b="0" i="0">
+                <a:solidFill>
+                  <a:srgbClr val="828282"/>
+                </a:solidFill>
+                <a:latin typeface="Arial"/>
+              </a:rPr>
+              <a:t>平和が来た、私たちの王は私たちとともにいる</a:t>
+            </a:r>
+          </a:p>
+        </p:txBody>
+      </p:sp>
     </p:spTree>
   </p:cSld>
   <p:clrMapOvr>
@@ -3469,6 +3679,76 @@
           </a:p>
         </p:txBody>
       </p:sp>
+      <p:sp>
+        <p:nvSpPr>
+          <p:cNvPr id="4" name="TextBox 3"/>
+          <p:cNvSpPr txBox="1"/>
+          <p:nvPr/>
+        </p:nvSpPr>
+        <p:spPr>
+          <a:xfrm>
+            <a:off x="640080" y="4128516"/>
+            <a:ext cx="10911535" cy="310896"/>
+          </a:xfrm>
+          <a:prstGeom prst="rect">
+            <a:avLst/>
+          </a:prstGeom>
+          <a:noFill/>
+        </p:spPr>
+        <p:txBody>
+          <a:bodyPr wrap="square">
+            <a:spAutoFit/>
+          </a:bodyPr>
+          <a:lstStyle/>
+          <a:p>
+            <a:pPr algn="ctr"/>
+            <a:r>
+              <a:rPr sz="2000" b="0" i="0">
+                <a:solidFill>
+                  <a:srgbClr val="828282"/>
+                </a:solidFill>
+                <a:latin typeface="Arial"/>
+              </a:rPr>
+              <a:t>おお、来て礼拝しよう</a:t>
+            </a:r>
+          </a:p>
+        </p:txBody>
+      </p:sp>
+      <p:sp>
+        <p:nvSpPr>
+          <p:cNvPr id="5" name="TextBox 4"/>
+          <p:cNvSpPr txBox="1"/>
+          <p:nvPr/>
+        </p:nvSpPr>
+        <p:spPr>
+          <a:xfrm>
+            <a:off x="640080" y="4494276"/>
+            <a:ext cx="10911535" cy="310896"/>
+          </a:xfrm>
+          <a:prstGeom prst="rect">
+            <a:avLst/>
+          </a:prstGeom>
+          <a:noFill/>
+        </p:spPr>
+        <p:txBody>
+          <a:bodyPr wrap="square">
+            <a:spAutoFit/>
+          </a:bodyPr>
+          <a:lstStyle/>
+          <a:p>
+            <a:pPr algn="ctr"/>
+            <a:r>
+              <a:rPr sz="2000" b="0" i="0">
+                <a:solidFill>
+                  <a:srgbClr val="828282"/>
+                </a:solidFill>
+                <a:latin typeface="Arial"/>
+              </a:rPr>
+              <a:t>おお、来てキリスト、主を礼拝しよう</a:t>
+            </a:r>
+          </a:p>
+        </p:txBody>
+      </p:sp>
     </p:spTree>
   </p:cSld>
   <p:clrMapOvr>
@@ -3530,6 +3810,41 @@
           </a:p>
         </p:txBody>
       </p:sp>
+      <p:sp>
+        <p:nvSpPr>
+          <p:cNvPr id="3" name="TextBox 2"/>
+          <p:cNvSpPr txBox="1"/>
+          <p:nvPr/>
+        </p:nvSpPr>
+        <p:spPr>
+          <a:xfrm>
+            <a:off x="640080" y="3845052"/>
+            <a:ext cx="10911535" cy="310896"/>
+          </a:xfrm>
+          <a:prstGeom prst="rect">
+            <a:avLst/>
+          </a:prstGeom>
+          <a:noFill/>
+        </p:spPr>
+        <p:txBody>
+          <a:bodyPr wrap="square">
+            <a:spAutoFit/>
+          </a:bodyPr>
+          <a:lstStyle/>
+          <a:p>
+            <a:pPr algn="ctr"/>
+            <a:r>
+              <a:rPr sz="2000" b="0" i="0">
+                <a:solidFill>
+                  <a:srgbClr val="828282"/>
+                </a:solidFill>
+                <a:latin typeface="Arial"/>
+              </a:rPr>
+              <a:t>おお、来てキリスト主を礼拝しよう</a:t>
+            </a:r>
+          </a:p>
+        </p:txBody>
+      </p:sp>
     </p:spTree>
   </p:cSld>
   <p:clrMapOvr>
@@ -3626,6 +3941,76 @@
           </a:p>
         </p:txBody>
       </p:sp>
+      <p:sp>
+        <p:nvSpPr>
+          <p:cNvPr id="4" name="TextBox 3"/>
+          <p:cNvSpPr txBox="1"/>
+          <p:nvPr/>
+        </p:nvSpPr>
+        <p:spPr>
+          <a:xfrm>
+            <a:off x="640080" y="4128516"/>
+            <a:ext cx="10911535" cy="310896"/>
+          </a:xfrm>
+          <a:prstGeom prst="rect">
+            <a:avLst/>
+          </a:prstGeom>
+          <a:noFill/>
+        </p:spPr>
+        <p:txBody>
+          <a:bodyPr wrap="square">
+            <a:spAutoFit/>
+          </a:bodyPr>
+          <a:lstStyle/>
+          <a:p>
+            <a:pPr algn="ctr"/>
+            <a:r>
+              <a:rPr sz="2000" b="0" i="0">
+                <a:solidFill>
+                  <a:srgbClr val="828282"/>
+                </a:solidFill>
+                <a:latin typeface="Arial"/>
+              </a:rPr>
+              <a:t>イエスよ、私たちはあなたを礼拝します</a:t>
+            </a:r>
+          </a:p>
+        </p:txBody>
+      </p:sp>
+      <p:sp>
+        <p:nvSpPr>
+          <p:cNvPr id="5" name="TextBox 4"/>
+          <p:cNvSpPr txBox="1"/>
+          <p:nvPr/>
+        </p:nvSpPr>
+        <p:spPr>
+          <a:xfrm>
+            <a:off x="640080" y="4494276"/>
+            <a:ext cx="10911535" cy="310896"/>
+          </a:xfrm>
+          <a:prstGeom prst="rect">
+            <a:avLst/>
+          </a:prstGeom>
+          <a:noFill/>
+        </p:spPr>
+        <p:txBody>
+          <a:bodyPr wrap="square">
+            <a:spAutoFit/>
+          </a:bodyPr>
+          <a:lstStyle/>
+          <a:p>
+            <a:pPr algn="ctr"/>
+            <a:r>
+              <a:rPr sz="2000" b="0" i="0">
+                <a:solidFill>
+                  <a:srgbClr val="828282"/>
+                </a:solidFill>
+                <a:latin typeface="Arial"/>
+              </a:rPr>
+              <a:t>平和が来た、私たちの王は私たちとともにいる</a:t>
+            </a:r>
+          </a:p>
+        </p:txBody>
+      </p:sp>
     </p:spTree>
   </p:cSld>
   <p:clrMapOvr>
@@ -3722,6 +4107,76 @@
           </a:p>
         </p:txBody>
       </p:sp>
+      <p:sp>
+        <p:nvSpPr>
+          <p:cNvPr id="4" name="TextBox 3"/>
+          <p:cNvSpPr txBox="1"/>
+          <p:nvPr/>
+        </p:nvSpPr>
+        <p:spPr>
+          <a:xfrm>
+            <a:off x="640080" y="4128516"/>
+            <a:ext cx="10911535" cy="310896"/>
+          </a:xfrm>
+          <a:prstGeom prst="rect">
+            <a:avLst/>
+          </a:prstGeom>
+          <a:noFill/>
+        </p:spPr>
+        <p:txBody>
+          <a:bodyPr wrap="square">
+            <a:spAutoFit/>
+          </a:bodyPr>
+          <a:lstStyle/>
+          <a:p>
+            <a:pPr algn="ctr"/>
+            <a:r>
+              <a:rPr sz="2000" b="0" i="0">
+                <a:solidFill>
+                  <a:srgbClr val="828282"/>
+                </a:solidFill>
+                <a:latin typeface="Arial"/>
+              </a:rPr>
+              <a:t>おお、来て礼拝しよう</a:t>
+            </a:r>
+          </a:p>
+        </p:txBody>
+      </p:sp>
+      <p:sp>
+        <p:nvSpPr>
+          <p:cNvPr id="5" name="TextBox 4"/>
+          <p:cNvSpPr txBox="1"/>
+          <p:nvPr/>
+        </p:nvSpPr>
+        <p:spPr>
+          <a:xfrm>
+            <a:off x="640080" y="4494276"/>
+            <a:ext cx="10911535" cy="310896"/>
+          </a:xfrm>
+          <a:prstGeom prst="rect">
+            <a:avLst/>
+          </a:prstGeom>
+          <a:noFill/>
+        </p:spPr>
+        <p:txBody>
+          <a:bodyPr wrap="square">
+            <a:spAutoFit/>
+          </a:bodyPr>
+          <a:lstStyle/>
+          <a:p>
+            <a:pPr algn="ctr"/>
+            <a:r>
+              <a:rPr sz="2000" b="0" i="0">
+                <a:solidFill>
+                  <a:srgbClr val="828282"/>
+                </a:solidFill>
+                <a:latin typeface="Arial"/>
+              </a:rPr>
+              <a:t>おお、来てキリスト、主を礼拝しよう</a:t>
+            </a:r>
+          </a:p>
+        </p:txBody>
+      </p:sp>
     </p:spTree>
   </p:cSld>
   <p:clrMapOvr>
@@ -3783,6 +4238,41 @@
           </a:p>
         </p:txBody>
       </p:sp>
+      <p:sp>
+        <p:nvSpPr>
+          <p:cNvPr id="3" name="TextBox 2"/>
+          <p:cNvSpPr txBox="1"/>
+          <p:nvPr/>
+        </p:nvSpPr>
+        <p:spPr>
+          <a:xfrm>
+            <a:off x="640080" y="3845052"/>
+            <a:ext cx="10911535" cy="310896"/>
+          </a:xfrm>
+          <a:prstGeom prst="rect">
+            <a:avLst/>
+          </a:prstGeom>
+          <a:noFill/>
+        </p:spPr>
+        <p:txBody>
+          <a:bodyPr wrap="square">
+            <a:spAutoFit/>
+          </a:bodyPr>
+          <a:lstStyle/>
+          <a:p>
+            <a:pPr algn="ctr"/>
+            <a:r>
+              <a:rPr sz="2000" b="0" i="0">
+                <a:solidFill>
+                  <a:srgbClr val="828282"/>
+                </a:solidFill>
+                <a:latin typeface="Arial"/>
+              </a:rPr>
+              <a:t>おお、来てキリスト主を礼拝しよう</a:t>
+            </a:r>
+          </a:p>
+        </p:txBody>
+      </p:sp>
     </p:spTree>
   </p:cSld>
   <p:clrMapOvr>
@@ -3879,6 +4369,76 @@
           </a:p>
         </p:txBody>
       </p:sp>
+      <p:sp>
+        <p:nvSpPr>
+          <p:cNvPr id="4" name="TextBox 3"/>
+          <p:cNvSpPr txBox="1"/>
+          <p:nvPr/>
+        </p:nvSpPr>
+        <p:spPr>
+          <a:xfrm>
+            <a:off x="640080" y="4128516"/>
+            <a:ext cx="10911535" cy="310896"/>
+          </a:xfrm>
+          <a:prstGeom prst="rect">
+            <a:avLst/>
+          </a:prstGeom>
+          <a:noFill/>
+        </p:spPr>
+        <p:txBody>
+          <a:bodyPr wrap="square">
+            <a:spAutoFit/>
+          </a:bodyPr>
+          <a:lstStyle/>
+          <a:p>
+            <a:pPr algn="ctr"/>
+            <a:r>
+              <a:rPr sz="2000" b="0" i="0">
+                <a:solidFill>
+                  <a:srgbClr val="828282"/>
+                </a:solidFill>
+                <a:latin typeface="Arial"/>
+              </a:rPr>
+              <a:t>見よ、ベツレヘムの星が輝いた</a:t>
+            </a:r>
+          </a:p>
+        </p:txBody>
+      </p:sp>
+      <p:sp>
+        <p:nvSpPr>
+          <p:cNvPr id="5" name="TextBox 4"/>
+          <p:cNvSpPr txBox="1"/>
+          <p:nvPr/>
+        </p:nvSpPr>
+        <p:spPr>
+          <a:xfrm>
+            <a:off x="640080" y="4494276"/>
+            <a:ext cx="10911535" cy="310896"/>
+          </a:xfrm>
+          <a:prstGeom prst="rect">
+            <a:avLst/>
+          </a:prstGeom>
+          <a:noFill/>
+        </p:spPr>
+        <p:txBody>
+          <a:bodyPr wrap="square">
+            <a:spAutoFit/>
+          </a:bodyPr>
+          <a:lstStyle/>
+          <a:p>
+            <a:pPr algn="ctr"/>
+            <a:r>
+              <a:rPr sz="2000" b="0" i="0">
+                <a:solidFill>
+                  <a:srgbClr val="828282"/>
+                </a:solidFill>
+                <a:latin typeface="Arial"/>
+              </a:rPr>
+              <a:t>神の言葉は肉となった</a:t>
+            </a:r>
+          </a:p>
+        </p:txBody>
+      </p:sp>
     </p:spTree>
   </p:cSld>
   <p:clrMapOvr>
@@ -4176,6 +4736,41 @@
           </a:p>
         </p:txBody>
       </p:sp>
+      <p:sp>
+        <p:nvSpPr>
+          <p:cNvPr id="5" name="TextBox 4"/>
+          <p:cNvSpPr txBox="1"/>
+          <p:nvPr/>
+        </p:nvSpPr>
+        <p:spPr>
+          <a:xfrm>
+            <a:off x="640080" y="4494276"/>
+            <a:ext cx="10911535" cy="310896"/>
+          </a:xfrm>
+          <a:prstGeom prst="rect">
+            <a:avLst/>
+          </a:prstGeom>
+          <a:noFill/>
+        </p:spPr>
+        <p:txBody>
+          <a:bodyPr wrap="square">
+            <a:spAutoFit/>
+          </a:bodyPr>
+          <a:lstStyle/>
+          <a:p>
+            <a:pPr algn="ctr"/>
+            <a:r>
+              <a:rPr sz="2000" b="0" i="0">
+                <a:solidFill>
+                  <a:srgbClr val="828282"/>
+                </a:solidFill>
+                <a:latin typeface="Arial"/>
+              </a:rPr>
+              <a:t>来て、彼を礼拝しよう</a:t>
+            </a:r>
+          </a:p>
+        </p:txBody>
+      </p:sp>
     </p:spTree>
   </p:cSld>
   <p:clrMapOvr>
@@ -5107,6 +5702,76 @@
                 <a:latin typeface="Arial"/>
               </a:rPr>
               <a:t>Ele reina com amor no trono de Davi</a:t>
+            </a:r>
+          </a:p>
+        </p:txBody>
+      </p:sp>
+      <p:sp>
+        <p:nvSpPr>
+          <p:cNvPr id="4" name="TextBox 3"/>
+          <p:cNvSpPr txBox="1"/>
+          <p:nvPr/>
+        </p:nvSpPr>
+        <p:spPr>
+          <a:xfrm>
+            <a:off x="640080" y="4128516"/>
+            <a:ext cx="10911535" cy="310896"/>
+          </a:xfrm>
+          <a:prstGeom prst="rect">
+            <a:avLst/>
+          </a:prstGeom>
+          <a:noFill/>
+        </p:spPr>
+        <p:txBody>
+          <a:bodyPr wrap="square">
+            <a:spAutoFit/>
+          </a:bodyPr>
+          <a:lstStyle/>
+          <a:p>
+            <a:pPr algn="ctr"/>
+            <a:r>
+              <a:rPr sz="2000" b="0" i="0">
+                <a:solidFill>
+                  <a:srgbClr val="828282"/>
+                </a:solidFill>
+                <a:latin typeface="Arial"/>
+              </a:rPr>
+              <a:t>彼は腕を広げてすべての者に来る</a:t>
+            </a:r>
+          </a:p>
+        </p:txBody>
+      </p:sp>
+      <p:sp>
+        <p:nvSpPr>
+          <p:cNvPr id="5" name="TextBox 4"/>
+          <p:cNvSpPr txBox="1"/>
+          <p:nvPr/>
+        </p:nvSpPr>
+        <p:spPr>
+          <a:xfrm>
+            <a:off x="640080" y="4494276"/>
+            <a:ext cx="10911535" cy="310896"/>
+          </a:xfrm>
+          <a:prstGeom prst="rect">
+            <a:avLst/>
+          </a:prstGeom>
+          <a:noFill/>
+        </p:spPr>
+        <p:txBody>
+          <a:bodyPr wrap="square">
+            <a:spAutoFit/>
+          </a:bodyPr>
+          <a:lstStyle/>
+          <a:p>
+            <a:pPr algn="ctr"/>
+            <a:r>
+              <a:rPr sz="2000" b="0" i="0">
+                <a:solidFill>
+                  <a:srgbClr val="828282"/>
+                </a:solidFill>
+                <a:latin typeface="Arial"/>
+              </a:rPr>
+              <a:t>彼はダビデの王座で愛をもって統治する</a:t>
             </a:r>
           </a:p>
         </p:txBody>
